--- a/public/course-materials/pptx/Module-10-Sécurité-arnaques-phishing-bonnes-pratiques.pptx
+++ b/public/course-materials/pptx/Module-10-Sécurité-arnaques-phishing-bonnes-pratiques.pptx
@@ -3883,7 +3883,7 @@
     <p:bg>
       <p:bgPr>
         <a:solidFill>
-          <a:srgbClr val="0F1419"/>
+          <a:srgbClr val="0F1214"/>
         </a:solidFill>
       </p:bgPr>
     </p:bg>
@@ -3916,7 +3916,7 @@
             <a:avLst/>
           </a:prstGeom>
           <a:solidFill>
-            <a:srgbClr val="14B8A6">
+            <a:srgbClr val="3B968F">
               <a:alpha val="8000"/>
             </a:srgbClr>
           </a:solidFill>
@@ -3938,7 +3938,7 @@
             <a:avLst/>
           </a:prstGeom>
           <a:solidFill>
-            <a:srgbClr val="14B8A6">
+            <a:srgbClr val="3B968F">
               <a:alpha val="5000"/>
             </a:srgbClr>
           </a:solidFill>
@@ -3960,7 +3960,7 @@
             <a:avLst/>
           </a:prstGeom>
           <a:solidFill>
-            <a:srgbClr val="14B8A6"/>
+            <a:srgbClr val="3B968F"/>
           </a:solidFill>
           <a:ln/>
         </p:spPr>
@@ -4016,7 +4016,7 @@
             <a:r>
               <a:rPr lang="en-US" sz="1300" b="1" spc="400" kern="0" dirty="0">
                 <a:solidFill>
-                  <a:srgbClr val="14B8A6"/>
+                  <a:srgbClr val="3B968F"/>
                 </a:solidFill>
                 <a:latin typeface="Calibri" pitchFamily="34" charset="0"/>
                 <a:ea typeface="Calibri" pitchFamily="34" charset="-122"/>
@@ -4082,7 +4082,7 @@
             <a:avLst/>
           </a:prstGeom>
           <a:solidFill>
-            <a:srgbClr val="14B8A6"/>
+            <a:srgbClr val="3B968F"/>
           </a:solidFill>
           <a:ln/>
         </p:spPr>
@@ -4114,7 +4114,7 @@
             <a:r>
               <a:rPr lang="en-US" sz="1100" spc="300" kern="0" dirty="0">
                 <a:solidFill>
-                  <a:srgbClr val="64748B"/>
+                  <a:srgbClr val="5B6672"/>
                 </a:solidFill>
                 <a:latin typeface="Calibri" pitchFamily="34" charset="0"/>
                 <a:ea typeface="Calibri" pitchFamily="34" charset="-122"/>
@@ -4153,7 +4153,7 @@
             <a:r>
               <a:rPr lang="en-US" sz="1100" dirty="0">
                 <a:solidFill>
-                  <a:srgbClr val="94A3B8"/>
+                  <a:srgbClr val="8994A0"/>
                 </a:solidFill>
                 <a:latin typeface="Calibri" pitchFamily="34" charset="0"/>
                 <a:ea typeface="Calibri" pitchFamily="34" charset="-122"/>
@@ -4179,7 +4179,7 @@
     <p:bg>
       <p:bgPr>
         <a:solidFill>
-          <a:srgbClr val="0F1419"/>
+          <a:srgbClr val="0F1214"/>
         </a:solidFill>
       </p:bgPr>
     </p:bg>
@@ -4212,7 +4212,7 @@
             <a:avLst/>
           </a:prstGeom>
           <a:solidFill>
-            <a:srgbClr val="14B8A6">
+            <a:srgbClr val="3B968F">
               <a:alpha val="12000"/>
             </a:srgbClr>
           </a:solidFill>
@@ -4270,7 +4270,7 @@
             <a:r>
               <a:rPr lang="en-US" sz="2000" b="1" dirty="0">
                 <a:solidFill>
-                  <a:srgbClr val="14B8A6"/>
+                  <a:srgbClr val="3B968F"/>
                 </a:solidFill>
                 <a:latin typeface="Calibri" pitchFamily="34" charset="0"/>
                 <a:ea typeface="Calibri" pitchFamily="34" charset="-122"/>
@@ -4394,7 +4394,7 @@
             <a:r>
               <a:rPr lang="en-US" sz="900" dirty="0">
                 <a:solidFill>
-                  <a:srgbClr val="64748B"/>
+                  <a:srgbClr val="5B6672"/>
                 </a:solidFill>
                 <a:latin typeface="Calibri" pitchFamily="34" charset="0"/>
                 <a:ea typeface="Calibri" pitchFamily="34" charset="-122"/>
@@ -4420,7 +4420,7 @@
     <p:bg>
       <p:bgPr>
         <a:solidFill>
-          <a:srgbClr val="0F1419"/>
+          <a:srgbClr val="0F1214"/>
         </a:solidFill>
       </p:bgPr>
     </p:bg>
@@ -4453,7 +4453,7 @@
             <a:avLst/>
           </a:prstGeom>
           <a:solidFill>
-            <a:srgbClr val="14B8A6">
+            <a:srgbClr val="3B968F">
               <a:alpha val="12000"/>
             </a:srgbClr>
           </a:solidFill>
@@ -4511,7 +4511,7 @@
             <a:r>
               <a:rPr lang="en-US" sz="2000" b="1" dirty="0">
                 <a:solidFill>
-                  <a:srgbClr val="14B8A6"/>
+                  <a:srgbClr val="3B968F"/>
                 </a:solidFill>
                 <a:latin typeface="Calibri" pitchFamily="34" charset="0"/>
                 <a:ea typeface="Calibri" pitchFamily="34" charset="-122"/>
@@ -4614,7 +4614,7 @@
             <a:r>
               <a:rPr lang="en-US" sz="900" dirty="0">
                 <a:solidFill>
-                  <a:srgbClr val="64748B"/>
+                  <a:srgbClr val="5B6672"/>
                 </a:solidFill>
                 <a:latin typeface="Calibri" pitchFamily="34" charset="0"/>
                 <a:ea typeface="Calibri" pitchFamily="34" charset="-122"/>
@@ -4640,7 +4640,7 @@
     <p:bg>
       <p:bgPr>
         <a:solidFill>
-          <a:srgbClr val="0F1419"/>
+          <a:srgbClr val="0F1214"/>
         </a:solidFill>
       </p:bgPr>
     </p:bg>
@@ -4685,7 +4685,7 @@
             <a:r>
               <a:rPr lang="en-US" sz="2000" b="1" dirty="0">
                 <a:solidFill>
-                  <a:srgbClr val="14B8A6"/>
+                  <a:srgbClr val="3B968F"/>
                 </a:solidFill>
                 <a:latin typeface="Calibri" pitchFamily="34" charset="0"/>
                 <a:ea typeface="Calibri" pitchFamily="34" charset="-122"/>
@@ -4714,7 +4714,7 @@
             </a:avLst>
           </a:prstGeom>
           <a:solidFill>
-            <a:srgbClr val="1A2332"/>
+            <a:srgbClr val="1A2026"/>
           </a:solidFill>
           <a:ln/>
         </p:spPr>
@@ -4799,7 +4799,7 @@
             </a:avLst>
           </a:prstGeom>
           <a:solidFill>
-            <a:srgbClr val="1A2332"/>
+            <a:srgbClr val="1A2026"/>
           </a:solidFill>
           <a:ln/>
         </p:spPr>
@@ -4894,7 +4894,7 @@
             <a:r>
               <a:rPr lang="en-US" sz="900" dirty="0">
                 <a:solidFill>
-                  <a:srgbClr val="94A3B8"/>
+                  <a:srgbClr val="8994A0"/>
                 </a:solidFill>
                 <a:latin typeface="Calibri" pitchFamily="34" charset="0"/>
                 <a:ea typeface="Calibri" pitchFamily="34" charset="-122"/>
@@ -4923,7 +4923,7 @@
             </a:avLst>
           </a:prstGeom>
           <a:solidFill>
-            <a:srgbClr val="1A2332"/>
+            <a:srgbClr val="1A2026"/>
           </a:solidFill>
           <a:ln/>
         </p:spPr>
@@ -5005,7 +5005,7 @@
     <p:bg>
       <p:bgPr>
         <a:solidFill>
-          <a:srgbClr val="0F1419"/>
+          <a:srgbClr val="0F1214"/>
         </a:solidFill>
       </p:bgPr>
     </p:bg>
@@ -5038,7 +5038,7 @@
             <a:avLst/>
           </a:prstGeom>
           <a:solidFill>
-            <a:srgbClr val="14B8A6">
+            <a:srgbClr val="3B968F">
               <a:alpha val="12000"/>
             </a:srgbClr>
           </a:solidFill>
@@ -5096,7 +5096,7 @@
             <a:r>
               <a:rPr lang="en-US" sz="2000" b="1" dirty="0">
                 <a:solidFill>
-                  <a:srgbClr val="14B8A6"/>
+                  <a:srgbClr val="3B968F"/>
                 </a:solidFill>
                 <a:latin typeface="Calibri" pitchFamily="34" charset="0"/>
                 <a:ea typeface="Calibri" pitchFamily="34" charset="-122"/>
@@ -5220,7 +5220,7 @@
             <a:r>
               <a:rPr lang="en-US" sz="900" dirty="0">
                 <a:solidFill>
-                  <a:srgbClr val="64748B"/>
+                  <a:srgbClr val="5B6672"/>
                 </a:solidFill>
                 <a:latin typeface="Calibri" pitchFamily="34" charset="0"/>
                 <a:ea typeface="Calibri" pitchFamily="34" charset="-122"/>
@@ -5246,7 +5246,7 @@
     <p:bg>
       <p:bgPr>
         <a:solidFill>
-          <a:srgbClr val="0F1419"/>
+          <a:srgbClr val="0F1214"/>
         </a:solidFill>
       </p:bgPr>
     </p:bg>
@@ -5291,7 +5291,7 @@
             <a:r>
               <a:rPr lang="en-US" sz="2000" b="1" dirty="0">
                 <a:solidFill>
-                  <a:srgbClr val="14B8A6"/>
+                  <a:srgbClr val="3B968F"/>
                 </a:solidFill>
                 <a:latin typeface="Calibri" pitchFamily="34" charset="0"/>
                 <a:ea typeface="Calibri" pitchFamily="34" charset="-122"/>
@@ -5384,7 +5384,7 @@
             </a:avLst>
           </a:prstGeom>
           <a:solidFill>
-            <a:srgbClr val="1A2332"/>
+            <a:srgbClr val="1A2026"/>
           </a:solidFill>
           <a:ln/>
         </p:spPr>
@@ -5466,7 +5466,7 @@
     <p:bg>
       <p:bgPr>
         <a:solidFill>
-          <a:srgbClr val="0D2137"/>
+          <a:srgbClr val="12181D"/>
         </a:solidFill>
       </p:bgPr>
     </p:bg>
@@ -5547,7 +5547,7 @@
             <a:avLst/>
           </a:prstGeom>
           <a:solidFill>
-            <a:srgbClr val="14B8A6">
+            <a:srgbClr val="3B968F">
               <a:alpha val="6000"/>
             </a:srgbClr>
           </a:solidFill>
@@ -5569,7 +5569,7 @@
             <a:avLst/>
           </a:prstGeom>
           <a:solidFill>
-            <a:srgbClr val="14B8A6"/>
+            <a:srgbClr val="3B968F"/>
           </a:solidFill>
           <a:ln/>
         </p:spPr>
@@ -5601,7 +5601,7 @@
             <a:r>
               <a:rPr lang="en-US" sz="1200" b="1" spc="200" kern="0" dirty="0">
                 <a:solidFill>
-                  <a:srgbClr val="14B8A6"/>
+                  <a:srgbClr val="3B968F"/>
                 </a:solidFill>
                 <a:latin typeface="Calibri" pitchFamily="34" charset="0"/>
                 <a:ea typeface="Calibri" pitchFamily="34" charset="-122"/>
@@ -5679,7 +5679,7 @@
             <a:r>
               <a:rPr lang="en-US" sz="1100" dirty="0">
                 <a:solidFill>
-                  <a:srgbClr val="64748B"/>
+                  <a:srgbClr val="5B6672"/>
                 </a:solidFill>
                 <a:latin typeface="Calibri" pitchFamily="34" charset="0"/>
                 <a:ea typeface="Calibri" pitchFamily="34" charset="-122"/>
@@ -5705,7 +5705,7 @@
     <p:bg>
       <p:bgPr>
         <a:solidFill>
-          <a:srgbClr val="0F1419"/>
+          <a:srgbClr val="0F1214"/>
         </a:solidFill>
       </p:bgPr>
     </p:bg>
@@ -5738,7 +5738,7 @@
             <a:avLst/>
           </a:prstGeom>
           <a:solidFill>
-            <a:srgbClr val="14B8A6">
+            <a:srgbClr val="3B968F">
               <a:alpha val="12000"/>
             </a:srgbClr>
           </a:solidFill>
@@ -5860,7 +5860,7 @@
             <a:r>
               <a:rPr lang="en-US" sz="900" dirty="0">
                 <a:solidFill>
-                  <a:srgbClr val="64748B"/>
+                  <a:srgbClr val="5B6672"/>
                 </a:solidFill>
                 <a:latin typeface="Calibri" pitchFamily="34" charset="0"/>
                 <a:ea typeface="Calibri" pitchFamily="34" charset="-122"/>
@@ -5886,7 +5886,7 @@
     <p:bg>
       <p:bgPr>
         <a:solidFill>
-          <a:srgbClr val="0F1419"/>
+          <a:srgbClr val="0F1214"/>
         </a:solidFill>
       </p:bgPr>
     </p:bg>
@@ -5931,7 +5931,7 @@
             <a:r>
               <a:rPr lang="en-US" sz="2000" b="1" dirty="0">
                 <a:solidFill>
-                  <a:srgbClr val="14B8A6"/>
+                  <a:srgbClr val="3B968F"/>
                 </a:solidFill>
                 <a:latin typeface="Calibri" pitchFamily="34" charset="0"/>
                 <a:ea typeface="Calibri" pitchFamily="34" charset="-122"/>
@@ -6045,7 +6045,7 @@
             </a:avLst>
           </a:prstGeom>
           <a:solidFill>
-            <a:srgbClr val="1A2332"/>
+            <a:srgbClr val="1A2026"/>
           </a:solidFill>
           <a:ln/>
         </p:spPr>
@@ -6130,7 +6130,7 @@
             </a:avLst>
           </a:prstGeom>
           <a:solidFill>
-            <a:srgbClr val="1A2332"/>
+            <a:srgbClr val="1A2026"/>
           </a:solidFill>
           <a:ln/>
         </p:spPr>
@@ -6212,7 +6212,7 @@
     <p:bg>
       <p:bgPr>
         <a:solidFill>
-          <a:srgbClr val="0F1419"/>
+          <a:srgbClr val="0F1214"/>
         </a:solidFill>
       </p:bgPr>
     </p:bg>
@@ -6257,7 +6257,7 @@
             <a:r>
               <a:rPr lang="en-US" sz="2000" b="1" dirty="0">
                 <a:solidFill>
-                  <a:srgbClr val="14B8A6"/>
+                  <a:srgbClr val="3B968F"/>
                 </a:solidFill>
                 <a:latin typeface="Calibri" pitchFamily="34" charset="0"/>
                 <a:ea typeface="Calibri" pitchFamily="34" charset="-122"/>
@@ -6286,7 +6286,7 @@
             </a:avLst>
           </a:prstGeom>
           <a:solidFill>
-            <a:srgbClr val="1A2332"/>
+            <a:srgbClr val="1A2026"/>
           </a:solidFill>
           <a:ln/>
         </p:spPr>
@@ -6371,7 +6371,7 @@
             </a:avLst>
           </a:prstGeom>
           <a:solidFill>
-            <a:srgbClr val="1A2332"/>
+            <a:srgbClr val="1A2026"/>
           </a:solidFill>
           <a:ln/>
         </p:spPr>
@@ -6466,7 +6466,7 @@
             <a:r>
               <a:rPr lang="en-US" sz="900" dirty="0">
                 <a:solidFill>
-                  <a:srgbClr val="94A3B8"/>
+                  <a:srgbClr val="8994A0"/>
                 </a:solidFill>
                 <a:latin typeface="Calibri" pitchFamily="34" charset="0"/>
                 <a:ea typeface="Calibri" pitchFamily="34" charset="-122"/>
@@ -6495,7 +6495,7 @@
             </a:avLst>
           </a:prstGeom>
           <a:solidFill>
-            <a:srgbClr val="1A2332"/>
+            <a:srgbClr val="1A2026"/>
           </a:solidFill>
           <a:ln/>
         </p:spPr>
@@ -6577,7 +6577,7 @@
     <p:bg>
       <p:bgPr>
         <a:solidFill>
-          <a:srgbClr val="0F1419"/>
+          <a:srgbClr val="0F1214"/>
         </a:solidFill>
       </p:bgPr>
     </p:bg>
@@ -6610,7 +6610,7 @@
             <a:avLst/>
           </a:prstGeom>
           <a:solidFill>
-            <a:srgbClr val="14B8A6">
+            <a:srgbClr val="3B968F">
               <a:alpha val="12000"/>
             </a:srgbClr>
           </a:solidFill>
@@ -6668,7 +6668,7 @@
             <a:r>
               <a:rPr lang="en-US" sz="2000" b="1" dirty="0">
                 <a:solidFill>
-                  <a:srgbClr val="14B8A6"/>
+                  <a:srgbClr val="3B968F"/>
                 </a:solidFill>
                 <a:latin typeface="Calibri" pitchFamily="34" charset="0"/>
                 <a:ea typeface="Calibri" pitchFamily="34" charset="-122"/>
@@ -6771,7 +6771,7 @@
             <a:r>
               <a:rPr lang="en-US" sz="900" dirty="0">
                 <a:solidFill>
-                  <a:srgbClr val="64748B"/>
+                  <a:srgbClr val="5B6672"/>
                 </a:solidFill>
                 <a:latin typeface="Calibri" pitchFamily="34" charset="0"/>
                 <a:ea typeface="Calibri" pitchFamily="34" charset="-122"/>
@@ -6797,7 +6797,7 @@
     <p:bg>
       <p:bgPr>
         <a:solidFill>
-          <a:srgbClr val="0F1419"/>
+          <a:srgbClr val="0F1214"/>
         </a:solidFill>
       </p:bgPr>
     </p:bg>
@@ -6842,7 +6842,7 @@
             <a:r>
               <a:rPr lang="en-US" sz="1200" b="1" spc="300" kern="0" dirty="0">
                 <a:solidFill>
-                  <a:srgbClr val="14B8A6"/>
+                  <a:srgbClr val="3B968F"/>
                 </a:solidFill>
                 <a:latin typeface="Calibri" pitchFamily="34" charset="0"/>
                 <a:ea typeface="Calibri" pitchFamily="34" charset="-122"/>
@@ -6910,7 +6910,7 @@
             </a:avLst>
           </a:prstGeom>
           <a:solidFill>
-            <a:srgbClr val="1A2332"/>
+            <a:srgbClr val="1A2026"/>
           </a:solidFill>
           <a:ln/>
         </p:spPr>
@@ -6942,7 +6942,7 @@
             <a:r>
               <a:rPr lang="en-US" sz="1300" b="1" dirty="0">
                 <a:solidFill>
-                  <a:srgbClr val="14B8A6"/>
+                  <a:srgbClr val="3B968F"/>
                 </a:solidFill>
                 <a:latin typeface="Calibri" pitchFamily="34" charset="0"/>
                 <a:ea typeface="Calibri" pitchFamily="34" charset="-122"/>
@@ -7034,7 +7034,7 @@
             </a:avLst>
           </a:prstGeom>
           <a:solidFill>
-            <a:srgbClr val="1A2332"/>
+            <a:srgbClr val="1A2026"/>
           </a:solidFill>
           <a:ln/>
         </p:spPr>
@@ -7066,7 +7066,7 @@
             <a:r>
               <a:rPr lang="en-US" sz="1300" b="1" dirty="0">
                 <a:solidFill>
-                  <a:srgbClr val="14B8A6"/>
+                  <a:srgbClr val="3B968F"/>
                 </a:solidFill>
                 <a:latin typeface="Calibri" pitchFamily="34" charset="0"/>
                 <a:ea typeface="Calibri" pitchFamily="34" charset="-122"/>
@@ -7158,7 +7158,7 @@
             </a:avLst>
           </a:prstGeom>
           <a:solidFill>
-            <a:srgbClr val="1A2332"/>
+            <a:srgbClr val="1A2026"/>
           </a:solidFill>
           <a:ln/>
         </p:spPr>
@@ -7190,7 +7190,7 @@
             <a:r>
               <a:rPr lang="en-US" sz="1300" b="1" dirty="0">
                 <a:solidFill>
-                  <a:srgbClr val="14B8A6"/>
+                  <a:srgbClr val="3B968F"/>
                 </a:solidFill>
                 <a:latin typeface="Calibri" pitchFamily="34" charset="0"/>
                 <a:ea typeface="Calibri" pitchFamily="34" charset="-122"/>
@@ -7279,7 +7279,7 @@
     <p:bg>
       <p:bgPr>
         <a:solidFill>
-          <a:srgbClr val="0F1419"/>
+          <a:srgbClr val="0F1214"/>
         </a:solidFill>
       </p:bgPr>
     </p:bg>
@@ -7324,7 +7324,7 @@
             <a:r>
               <a:rPr lang="en-US" sz="2000" b="1" dirty="0">
                 <a:solidFill>
-                  <a:srgbClr val="14B8A6"/>
+                  <a:srgbClr val="3B968F"/>
                 </a:solidFill>
                 <a:latin typeface="Calibri" pitchFamily="34" charset="0"/>
                 <a:ea typeface="Calibri" pitchFamily="34" charset="-122"/>
@@ -7438,7 +7438,7 @@
             </a:avLst>
           </a:prstGeom>
           <a:solidFill>
-            <a:srgbClr val="1A2332"/>
+            <a:srgbClr val="1A2026"/>
           </a:solidFill>
           <a:ln/>
         </p:spPr>
@@ -7523,7 +7523,7 @@
             </a:avLst>
           </a:prstGeom>
           <a:solidFill>
-            <a:srgbClr val="1A2332"/>
+            <a:srgbClr val="1A2026"/>
           </a:solidFill>
           <a:ln/>
         </p:spPr>
@@ -7605,7 +7605,7 @@
     <p:bg>
       <p:bgPr>
         <a:solidFill>
-          <a:srgbClr val="0F1419"/>
+          <a:srgbClr val="0F1214"/>
         </a:solidFill>
       </p:bgPr>
     </p:bg>
@@ -7650,7 +7650,7 @@
             <a:r>
               <a:rPr lang="en-US" sz="2000" b="1" dirty="0">
                 <a:solidFill>
-                  <a:srgbClr val="14B8A6"/>
+                  <a:srgbClr val="3B968F"/>
                 </a:solidFill>
                 <a:latin typeface="Calibri" pitchFamily="34" charset="0"/>
                 <a:ea typeface="Calibri" pitchFamily="34" charset="-122"/>
@@ -7679,7 +7679,7 @@
             </a:avLst>
           </a:prstGeom>
           <a:solidFill>
-            <a:srgbClr val="1A2332"/>
+            <a:srgbClr val="1A2026"/>
           </a:solidFill>
           <a:ln/>
         </p:spPr>
@@ -7774,7 +7774,7 @@
             <a:r>
               <a:rPr lang="en-US" sz="900" dirty="0">
                 <a:solidFill>
-                  <a:srgbClr val="94A3B8"/>
+                  <a:srgbClr val="8994A0"/>
                 </a:solidFill>
                 <a:latin typeface="Calibri" pitchFamily="34" charset="0"/>
                 <a:ea typeface="Calibri" pitchFamily="34" charset="-122"/>
@@ -7803,7 +7803,7 @@
             </a:avLst>
           </a:prstGeom>
           <a:solidFill>
-            <a:srgbClr val="1A2332"/>
+            <a:srgbClr val="1A2026"/>
           </a:solidFill>
           <a:ln/>
         </p:spPr>
@@ -7888,7 +7888,7 @@
             </a:avLst>
           </a:prstGeom>
           <a:solidFill>
-            <a:srgbClr val="1A2332"/>
+            <a:srgbClr val="1A2026"/>
           </a:solidFill>
           <a:ln/>
         </p:spPr>
@@ -7970,7 +7970,7 @@
     <p:bg>
       <p:bgPr>
         <a:solidFill>
-          <a:srgbClr val="0F1419"/>
+          <a:srgbClr val="0F1214"/>
         </a:solidFill>
       </p:bgPr>
     </p:bg>
@@ -8003,7 +8003,7 @@
             <a:avLst/>
           </a:prstGeom>
           <a:solidFill>
-            <a:srgbClr val="14B8A6">
+            <a:srgbClr val="3B968F">
               <a:alpha val="12000"/>
             </a:srgbClr>
           </a:solidFill>
@@ -8061,7 +8061,7 @@
             <a:r>
               <a:rPr lang="en-US" sz="2000" b="1" dirty="0">
                 <a:solidFill>
-                  <a:srgbClr val="14B8A6"/>
+                  <a:srgbClr val="3B968F"/>
                 </a:solidFill>
                 <a:latin typeface="Calibri" pitchFamily="34" charset="0"/>
                 <a:ea typeface="Calibri" pitchFamily="34" charset="-122"/>
@@ -8248,7 +8248,7 @@
             <a:r>
               <a:rPr lang="en-US" sz="900" dirty="0">
                 <a:solidFill>
-                  <a:srgbClr val="64748B"/>
+                  <a:srgbClr val="5B6672"/>
                 </a:solidFill>
                 <a:latin typeface="Calibri" pitchFamily="34" charset="0"/>
                 <a:ea typeface="Calibri" pitchFamily="34" charset="-122"/>
@@ -8274,7 +8274,7 @@
     <p:bg>
       <p:bgPr>
         <a:solidFill>
-          <a:srgbClr val="1A2332"/>
+          <a:srgbClr val="1A2026"/>
         </a:solidFill>
       </p:bgPr>
     </p:bg>
@@ -8343,7 +8343,7 @@
             <a:r>
               <a:rPr lang="en-US" sz="1200" b="1" spc="300" kern="0" dirty="0">
                 <a:solidFill>
-                  <a:srgbClr val="F59E0B"/>
+                  <a:srgbClr val="5BC1B8"/>
                 </a:solidFill>
                 <a:latin typeface="Calibri" pitchFamily="34" charset="0"/>
                 <a:ea typeface="Calibri" pitchFamily="34" charset="-122"/>
@@ -8411,7 +8411,7 @@
             </a:avLst>
           </a:prstGeom>
           <a:solidFill>
-            <a:srgbClr val="0F1419"/>
+            <a:srgbClr val="0F1214"/>
           </a:solidFill>
           <a:ln/>
         </p:spPr>
@@ -8433,7 +8433,7 @@
             </a:avLst>
           </a:prstGeom>
           <a:solidFill>
-            <a:srgbClr val="14B8A6"/>
+            <a:srgbClr val="3B968F"/>
           </a:solidFill>
           <a:ln/>
         </p:spPr>
@@ -8447,7 +8447,7 @@
             <a:r>
               <a:rPr lang="en-US" sz="1500" b="1" dirty="0">
                 <a:solidFill>
-                  <a:srgbClr val="0F1419"/>
+                  <a:srgbClr val="0F1214"/>
                 </a:solidFill>
                 <a:latin typeface="Calibri" pitchFamily="34" charset="0"/>
                 <a:ea typeface="Calibri" pitchFamily="34" charset="-122"/>
@@ -8515,7 +8515,7 @@
             </a:avLst>
           </a:prstGeom>
           <a:solidFill>
-            <a:srgbClr val="0F1419"/>
+            <a:srgbClr val="0F1214"/>
           </a:solidFill>
           <a:ln/>
         </p:spPr>
@@ -8537,7 +8537,7 @@
             </a:avLst>
           </a:prstGeom>
           <a:solidFill>
-            <a:srgbClr val="14B8A6"/>
+            <a:srgbClr val="3B968F"/>
           </a:solidFill>
           <a:ln/>
         </p:spPr>
@@ -8551,7 +8551,7 @@
             <a:r>
               <a:rPr lang="en-US" sz="1500" b="1" dirty="0">
                 <a:solidFill>
-                  <a:srgbClr val="0F1419"/>
+                  <a:srgbClr val="0F1214"/>
                 </a:solidFill>
                 <a:latin typeface="Calibri" pitchFamily="34" charset="0"/>
                 <a:ea typeface="Calibri" pitchFamily="34" charset="-122"/>
@@ -8619,7 +8619,7 @@
             </a:avLst>
           </a:prstGeom>
           <a:solidFill>
-            <a:srgbClr val="0F1419"/>
+            <a:srgbClr val="0F1214"/>
           </a:solidFill>
           <a:ln/>
         </p:spPr>
@@ -8641,7 +8641,7 @@
             </a:avLst>
           </a:prstGeom>
           <a:solidFill>
-            <a:srgbClr val="14B8A6"/>
+            <a:srgbClr val="3B968F"/>
           </a:solidFill>
           <a:ln/>
         </p:spPr>
@@ -8655,7 +8655,7 @@
             <a:r>
               <a:rPr lang="en-US" sz="1500" b="1" dirty="0">
                 <a:solidFill>
-                  <a:srgbClr val="0F1419"/>
+                  <a:srgbClr val="0F1214"/>
                 </a:solidFill>
                 <a:latin typeface="Calibri" pitchFamily="34" charset="0"/>
                 <a:ea typeface="Calibri" pitchFamily="34" charset="-122"/>
@@ -8723,7 +8723,7 @@
             </a:avLst>
           </a:prstGeom>
           <a:solidFill>
-            <a:srgbClr val="0F1419"/>
+            <a:srgbClr val="0F1214"/>
           </a:solidFill>
           <a:ln/>
         </p:spPr>
@@ -8745,7 +8745,7 @@
             </a:avLst>
           </a:prstGeom>
           <a:solidFill>
-            <a:srgbClr val="14B8A6"/>
+            <a:srgbClr val="3B968F"/>
           </a:solidFill>
           <a:ln/>
         </p:spPr>
@@ -8759,7 +8759,7 @@
             <a:r>
               <a:rPr lang="en-US" sz="1500" b="1" dirty="0">
                 <a:solidFill>
-                  <a:srgbClr val="0F1419"/>
+                  <a:srgbClr val="0F1214"/>
                 </a:solidFill>
                 <a:latin typeface="Calibri" pitchFamily="34" charset="0"/>
                 <a:ea typeface="Calibri" pitchFamily="34" charset="-122"/>
@@ -8827,7 +8827,7 @@
             </a:avLst>
           </a:prstGeom>
           <a:solidFill>
-            <a:srgbClr val="0F1419"/>
+            <a:srgbClr val="0F1214"/>
           </a:solidFill>
           <a:ln/>
         </p:spPr>
@@ -8849,7 +8849,7 @@
             </a:avLst>
           </a:prstGeom>
           <a:solidFill>
-            <a:srgbClr val="14B8A6"/>
+            <a:srgbClr val="3B968F"/>
           </a:solidFill>
           <a:ln/>
         </p:spPr>
@@ -8863,7 +8863,7 @@
             <a:r>
               <a:rPr lang="en-US" sz="1500" b="1" dirty="0">
                 <a:solidFill>
-                  <a:srgbClr val="0F1419"/>
+                  <a:srgbClr val="0F1214"/>
                 </a:solidFill>
                 <a:latin typeface="Calibri" pitchFamily="34" charset="0"/>
                 <a:ea typeface="Calibri" pitchFamily="34" charset="-122"/>
@@ -8928,7 +8928,7 @@
     <p:bg>
       <p:bgPr>
         <a:solidFill>
-          <a:srgbClr val="0F1419"/>
+          <a:srgbClr val="0F1214"/>
         </a:solidFill>
       </p:bgPr>
     </p:bg>
@@ -8963,7 +8963,7 @@
             </a:avLst>
           </a:prstGeom>
           <a:solidFill>
-            <a:srgbClr val="2D1B1B"/>
+            <a:srgbClr val="2A1414"/>
           </a:solidFill>
           <a:ln/>
         </p:spPr>
@@ -8983,7 +8983,7 @@
             <a:avLst/>
           </a:prstGeom>
           <a:solidFill>
-            <a:srgbClr val="EF4444"/>
+            <a:srgbClr val="DC2626"/>
           </a:solidFill>
           <a:ln/>
         </p:spPr>
@@ -9039,7 +9039,7 @@
             <a:r>
               <a:rPr lang="en-US" sz="1200" b="1" spc="300" kern="0" dirty="0">
                 <a:solidFill>
-                  <a:srgbClr val="EF4444"/>
+                  <a:srgbClr val="DC2626"/>
                 </a:solidFill>
                 <a:latin typeface="Calibri" pitchFamily="34" charset="0"/>
                 <a:ea typeface="Calibri" pitchFamily="34" charset="-122"/>
@@ -9150,7 +9150,7 @@
     <p:bg>
       <p:bgPr>
         <a:solidFill>
-          <a:srgbClr val="0D2137"/>
+          <a:srgbClr val="12181D"/>
         </a:solidFill>
       </p:bgPr>
     </p:bg>
@@ -9231,7 +9231,7 @@
             <a:avLst/>
           </a:prstGeom>
           <a:solidFill>
-            <a:srgbClr val="14B8A6">
+            <a:srgbClr val="3B968F">
               <a:alpha val="6000"/>
             </a:srgbClr>
           </a:solidFill>
@@ -9253,7 +9253,7 @@
             <a:avLst/>
           </a:prstGeom>
           <a:solidFill>
-            <a:srgbClr val="14B8A6"/>
+            <a:srgbClr val="3B968F"/>
           </a:solidFill>
           <a:ln/>
         </p:spPr>
@@ -9285,7 +9285,7 @@
             <a:r>
               <a:rPr lang="en-US" sz="1200" b="1" spc="200" kern="0" dirty="0">
                 <a:solidFill>
-                  <a:srgbClr val="14B8A6"/>
+                  <a:srgbClr val="3B968F"/>
                 </a:solidFill>
                 <a:latin typeface="Calibri" pitchFamily="34" charset="0"/>
                 <a:ea typeface="Calibri" pitchFamily="34" charset="-122"/>
@@ -9363,7 +9363,7 @@
             <a:r>
               <a:rPr lang="en-US" sz="1100" dirty="0">
                 <a:solidFill>
-                  <a:srgbClr val="64748B"/>
+                  <a:srgbClr val="5B6672"/>
                 </a:solidFill>
                 <a:latin typeface="Calibri" pitchFamily="34" charset="0"/>
                 <a:ea typeface="Calibri" pitchFamily="34" charset="-122"/>
@@ -9389,7 +9389,7 @@
     <p:bg>
       <p:bgPr>
         <a:solidFill>
-          <a:srgbClr val="0F1419"/>
+          <a:srgbClr val="0F1214"/>
         </a:solidFill>
       </p:bgPr>
     </p:bg>
@@ -9422,7 +9422,7 @@
             <a:avLst/>
           </a:prstGeom>
           <a:solidFill>
-            <a:srgbClr val="14B8A6">
+            <a:srgbClr val="3B968F">
               <a:alpha val="12000"/>
             </a:srgbClr>
           </a:solidFill>
@@ -9523,7 +9523,7 @@
             <a:r>
               <a:rPr lang="en-US" sz="900" dirty="0">
                 <a:solidFill>
-                  <a:srgbClr val="64748B"/>
+                  <a:srgbClr val="5B6672"/>
                 </a:solidFill>
                 <a:latin typeface="Calibri" pitchFamily="34" charset="0"/>
                 <a:ea typeface="Calibri" pitchFamily="34" charset="-122"/>
@@ -9549,7 +9549,7 @@
     <p:bg>
       <p:bgPr>
         <a:solidFill>
-          <a:srgbClr val="0F1419"/>
+          <a:srgbClr val="0F1214"/>
         </a:solidFill>
       </p:bgPr>
     </p:bg>
@@ -9594,7 +9594,7 @@
             <a:r>
               <a:rPr lang="en-US" sz="2000" b="1" dirty="0">
                 <a:solidFill>
-                  <a:srgbClr val="14B8A6"/>
+                  <a:srgbClr val="3B968F"/>
                 </a:solidFill>
                 <a:latin typeface="Calibri" pitchFamily="34" charset="0"/>
                 <a:ea typeface="Calibri" pitchFamily="34" charset="-122"/>
@@ -9687,7 +9687,7 @@
             </a:avLst>
           </a:prstGeom>
           <a:solidFill>
-            <a:srgbClr val="1A2332"/>
+            <a:srgbClr val="1A2026"/>
           </a:solidFill>
           <a:ln/>
         </p:spPr>
@@ -9772,7 +9772,7 @@
             </a:avLst>
           </a:prstGeom>
           <a:solidFill>
-            <a:srgbClr val="1A2332"/>
+            <a:srgbClr val="1A2026"/>
           </a:solidFill>
           <a:ln/>
         </p:spPr>
@@ -9854,7 +9854,7 @@
     <p:bg>
       <p:bgPr>
         <a:solidFill>
-          <a:srgbClr val="0F1419"/>
+          <a:srgbClr val="0F1214"/>
         </a:solidFill>
       </p:bgPr>
     </p:bg>
@@ -9887,7 +9887,7 @@
             <a:avLst/>
           </a:prstGeom>
           <a:solidFill>
-            <a:srgbClr val="14B8A6">
+            <a:srgbClr val="3B968F">
               <a:alpha val="12000"/>
             </a:srgbClr>
           </a:solidFill>
@@ -9945,7 +9945,7 @@
             <a:r>
               <a:rPr lang="en-US" sz="2000" b="1" dirty="0">
                 <a:solidFill>
-                  <a:srgbClr val="14B8A6"/>
+                  <a:srgbClr val="3B968F"/>
                 </a:solidFill>
                 <a:latin typeface="Calibri" pitchFamily="34" charset="0"/>
                 <a:ea typeface="Calibri" pitchFamily="34" charset="-122"/>
@@ -10153,7 +10153,7 @@
             <a:r>
               <a:rPr lang="en-US" sz="900" dirty="0">
                 <a:solidFill>
-                  <a:srgbClr val="64748B"/>
+                  <a:srgbClr val="5B6672"/>
                 </a:solidFill>
                 <a:latin typeface="Calibri" pitchFamily="34" charset="0"/>
                 <a:ea typeface="Calibri" pitchFamily="34" charset="-122"/>
@@ -10179,7 +10179,7 @@
     <p:bg>
       <p:bgPr>
         <a:solidFill>
-          <a:srgbClr val="0F1419"/>
+          <a:srgbClr val="0F1214"/>
         </a:solidFill>
       </p:bgPr>
     </p:bg>
@@ -10212,7 +10212,7 @@
             <a:avLst/>
           </a:prstGeom>
           <a:solidFill>
-            <a:srgbClr val="14B8A6">
+            <a:srgbClr val="3B968F">
               <a:alpha val="12000"/>
             </a:srgbClr>
           </a:solidFill>
@@ -10270,7 +10270,7 @@
             <a:r>
               <a:rPr lang="en-US" sz="2000" b="1" dirty="0">
                 <a:solidFill>
-                  <a:srgbClr val="14B8A6"/>
+                  <a:srgbClr val="3B968F"/>
                 </a:solidFill>
                 <a:latin typeface="Calibri" pitchFamily="34" charset="0"/>
                 <a:ea typeface="Calibri" pitchFamily="34" charset="-122"/>
@@ -10415,7 +10415,7 @@
             <a:r>
               <a:rPr lang="en-US" sz="900" dirty="0">
                 <a:solidFill>
-                  <a:srgbClr val="64748B"/>
+                  <a:srgbClr val="5B6672"/>
                 </a:solidFill>
                 <a:latin typeface="Calibri" pitchFamily="34" charset="0"/>
                 <a:ea typeface="Calibri" pitchFamily="34" charset="-122"/>
@@ -10441,7 +10441,7 @@
     <p:bg>
       <p:bgPr>
         <a:solidFill>
-          <a:srgbClr val="0D2137"/>
+          <a:srgbClr val="12181D"/>
         </a:solidFill>
       </p:bgPr>
     </p:bg>
@@ -10522,7 +10522,7 @@
             <a:avLst/>
           </a:prstGeom>
           <a:solidFill>
-            <a:srgbClr val="14B8A6">
+            <a:srgbClr val="3B968F">
               <a:alpha val="6000"/>
             </a:srgbClr>
           </a:solidFill>
@@ -10544,7 +10544,7 @@
             <a:avLst/>
           </a:prstGeom>
           <a:solidFill>
-            <a:srgbClr val="14B8A6"/>
+            <a:srgbClr val="3B968F"/>
           </a:solidFill>
           <a:ln/>
         </p:spPr>
@@ -10576,7 +10576,7 @@
             <a:r>
               <a:rPr lang="en-US" sz="1200" b="1" spc="200" kern="0" dirty="0">
                 <a:solidFill>
-                  <a:srgbClr val="14B8A6"/>
+                  <a:srgbClr val="3B968F"/>
                 </a:solidFill>
                 <a:latin typeface="Calibri" pitchFamily="34" charset="0"/>
                 <a:ea typeface="Calibri" pitchFamily="34" charset="-122"/>
@@ -10654,7 +10654,7 @@
             <a:r>
               <a:rPr lang="en-US" sz="1100" dirty="0">
                 <a:solidFill>
-                  <a:srgbClr val="64748B"/>
+                  <a:srgbClr val="5B6672"/>
                 </a:solidFill>
                 <a:latin typeface="Calibri" pitchFamily="34" charset="0"/>
                 <a:ea typeface="Calibri" pitchFamily="34" charset="-122"/>
@@ -10680,7 +10680,7 @@
     <p:bg>
       <p:bgPr>
         <a:solidFill>
-          <a:srgbClr val="0F1419"/>
+          <a:srgbClr val="0F1214"/>
         </a:solidFill>
       </p:bgPr>
     </p:bg>
@@ -10725,7 +10725,7 @@
             <a:r>
               <a:rPr lang="en-US" sz="2000" b="1" dirty="0">
                 <a:solidFill>
-                  <a:srgbClr val="14B8A6"/>
+                  <a:srgbClr val="3B968F"/>
                 </a:solidFill>
                 <a:latin typeface="Calibri" pitchFamily="34" charset="0"/>
                 <a:ea typeface="Calibri" pitchFamily="34" charset="-122"/>
@@ -10839,7 +10839,7 @@
             </a:avLst>
           </a:prstGeom>
           <a:solidFill>
-            <a:srgbClr val="1A2332"/>
+            <a:srgbClr val="1A2026"/>
           </a:solidFill>
           <a:ln/>
         </p:spPr>
@@ -10924,7 +10924,7 @@
             </a:avLst>
           </a:prstGeom>
           <a:solidFill>
-            <a:srgbClr val="1A2332"/>
+            <a:srgbClr val="1A2026"/>
           </a:solidFill>
           <a:ln/>
         </p:spPr>
@@ -11009,7 +11009,7 @@
             </a:avLst>
           </a:prstGeom>
           <a:solidFill>
-            <a:srgbClr val="1A2332"/>
+            <a:srgbClr val="1A2026"/>
           </a:solidFill>
           <a:ln/>
         </p:spPr>
@@ -11091,7 +11091,7 @@
     <p:bg>
       <p:bgPr>
         <a:solidFill>
-          <a:srgbClr val="0F1419"/>
+          <a:srgbClr val="0F1214"/>
         </a:solidFill>
       </p:bgPr>
     </p:bg>
@@ -11136,7 +11136,7 @@
             <a:r>
               <a:rPr lang="en-US" sz="2000" b="1" dirty="0">
                 <a:solidFill>
-                  <a:srgbClr val="14B8A6"/>
+                  <a:srgbClr val="3B968F"/>
                 </a:solidFill>
                 <a:latin typeface="Calibri" pitchFamily="34" charset="0"/>
                 <a:ea typeface="Calibri" pitchFamily="34" charset="-122"/>
@@ -11165,7 +11165,7 @@
             </a:avLst>
           </a:prstGeom>
           <a:solidFill>
-            <a:srgbClr val="1A2332"/>
+            <a:srgbClr val="1A2026"/>
           </a:solidFill>
           <a:ln/>
         </p:spPr>
@@ -11260,7 +11260,7 @@
             <a:r>
               <a:rPr lang="en-US" sz="900" dirty="0">
                 <a:solidFill>
-                  <a:srgbClr val="94A3B8"/>
+                  <a:srgbClr val="8994A0"/>
                 </a:solidFill>
                 <a:latin typeface="Calibri" pitchFamily="34" charset="0"/>
                 <a:ea typeface="Calibri" pitchFamily="34" charset="-122"/>
@@ -11289,7 +11289,7 @@
             </a:avLst>
           </a:prstGeom>
           <a:solidFill>
-            <a:srgbClr val="1A2332"/>
+            <a:srgbClr val="1A2026"/>
           </a:solidFill>
           <a:ln/>
         </p:spPr>
@@ -11374,7 +11374,7 @@
             </a:avLst>
           </a:prstGeom>
           <a:solidFill>
-            <a:srgbClr val="1A2332"/>
+            <a:srgbClr val="1A2026"/>
           </a:solidFill>
           <a:ln/>
         </p:spPr>
@@ -11456,7 +11456,7 @@
     <p:bg>
       <p:bgPr>
         <a:solidFill>
-          <a:srgbClr val="0F1419"/>
+          <a:srgbClr val="0F1214"/>
         </a:solidFill>
       </p:bgPr>
     </p:bg>
@@ -11489,7 +11489,7 @@
             <a:avLst/>
           </a:prstGeom>
           <a:solidFill>
-            <a:srgbClr val="14B8A6">
+            <a:srgbClr val="3B968F">
               <a:alpha val="12000"/>
             </a:srgbClr>
           </a:solidFill>
@@ -11547,7 +11547,7 @@
             <a:r>
               <a:rPr lang="en-US" sz="2000" b="1" dirty="0">
                 <a:solidFill>
-                  <a:srgbClr val="14B8A6"/>
+                  <a:srgbClr val="3B968F"/>
                 </a:solidFill>
                 <a:latin typeface="Calibri" pitchFamily="34" charset="0"/>
                 <a:ea typeface="Calibri" pitchFamily="34" charset="-122"/>
@@ -11734,7 +11734,7 @@
             <a:r>
               <a:rPr lang="en-US" sz="900" dirty="0">
                 <a:solidFill>
-                  <a:srgbClr val="64748B"/>
+                  <a:srgbClr val="5B6672"/>
                 </a:solidFill>
                 <a:latin typeface="Calibri" pitchFamily="34" charset="0"/>
                 <a:ea typeface="Calibri" pitchFamily="34" charset="-122"/>
@@ -11760,7 +11760,7 @@
     <p:bg>
       <p:bgPr>
         <a:solidFill>
-          <a:srgbClr val="1A2332"/>
+          <a:srgbClr val="1A2026"/>
         </a:solidFill>
       </p:bgPr>
     </p:bg>
@@ -11829,7 +11829,7 @@
             <a:r>
               <a:rPr lang="en-US" sz="1200" b="1" spc="300" kern="0" dirty="0">
                 <a:solidFill>
-                  <a:srgbClr val="F59E0B"/>
+                  <a:srgbClr val="5BC1B8"/>
                 </a:solidFill>
                 <a:latin typeface="Calibri" pitchFamily="34" charset="0"/>
                 <a:ea typeface="Calibri" pitchFamily="34" charset="-122"/>
@@ -11897,7 +11897,7 @@
             </a:avLst>
           </a:prstGeom>
           <a:solidFill>
-            <a:srgbClr val="0F1419"/>
+            <a:srgbClr val="0F1214"/>
           </a:solidFill>
           <a:ln/>
         </p:spPr>
@@ -11919,7 +11919,7 @@
             </a:avLst>
           </a:prstGeom>
           <a:solidFill>
-            <a:srgbClr val="14B8A6"/>
+            <a:srgbClr val="3B968F"/>
           </a:solidFill>
           <a:ln/>
         </p:spPr>
@@ -11933,7 +11933,7 @@
             <a:r>
               <a:rPr lang="en-US" sz="1500" b="1" dirty="0">
                 <a:solidFill>
-                  <a:srgbClr val="0F1419"/>
+                  <a:srgbClr val="0F1214"/>
                 </a:solidFill>
                 <a:latin typeface="Calibri" pitchFamily="34" charset="0"/>
                 <a:ea typeface="Calibri" pitchFamily="34" charset="-122"/>
@@ -12001,7 +12001,7 @@
             </a:avLst>
           </a:prstGeom>
           <a:solidFill>
-            <a:srgbClr val="0F1419"/>
+            <a:srgbClr val="0F1214"/>
           </a:solidFill>
           <a:ln/>
         </p:spPr>
@@ -12023,7 +12023,7 @@
             </a:avLst>
           </a:prstGeom>
           <a:solidFill>
-            <a:srgbClr val="14B8A6"/>
+            <a:srgbClr val="3B968F"/>
           </a:solidFill>
           <a:ln/>
         </p:spPr>
@@ -12037,7 +12037,7 @@
             <a:r>
               <a:rPr lang="en-US" sz="1500" b="1" dirty="0">
                 <a:solidFill>
-                  <a:srgbClr val="0F1419"/>
+                  <a:srgbClr val="0F1214"/>
                 </a:solidFill>
                 <a:latin typeface="Calibri" pitchFamily="34" charset="0"/>
                 <a:ea typeface="Calibri" pitchFamily="34" charset="-122"/>
@@ -12105,7 +12105,7 @@
             </a:avLst>
           </a:prstGeom>
           <a:solidFill>
-            <a:srgbClr val="0F1419"/>
+            <a:srgbClr val="0F1214"/>
           </a:solidFill>
           <a:ln/>
         </p:spPr>
@@ -12127,7 +12127,7 @@
             </a:avLst>
           </a:prstGeom>
           <a:solidFill>
-            <a:srgbClr val="14B8A6"/>
+            <a:srgbClr val="3B968F"/>
           </a:solidFill>
           <a:ln/>
         </p:spPr>
@@ -12141,7 +12141,7 @@
             <a:r>
               <a:rPr lang="en-US" sz="1500" b="1" dirty="0">
                 <a:solidFill>
-                  <a:srgbClr val="0F1419"/>
+                  <a:srgbClr val="0F1214"/>
                 </a:solidFill>
                 <a:latin typeface="Calibri" pitchFamily="34" charset="0"/>
                 <a:ea typeface="Calibri" pitchFamily="34" charset="-122"/>
@@ -12209,7 +12209,7 @@
             </a:avLst>
           </a:prstGeom>
           <a:solidFill>
-            <a:srgbClr val="0F1419"/>
+            <a:srgbClr val="0F1214"/>
           </a:solidFill>
           <a:ln/>
         </p:spPr>
@@ -12231,7 +12231,7 @@
             </a:avLst>
           </a:prstGeom>
           <a:solidFill>
-            <a:srgbClr val="14B8A6"/>
+            <a:srgbClr val="3B968F"/>
           </a:solidFill>
           <a:ln/>
         </p:spPr>
@@ -12245,7 +12245,7 @@
             <a:r>
               <a:rPr lang="en-US" sz="1500" b="1" dirty="0">
                 <a:solidFill>
-                  <a:srgbClr val="0F1419"/>
+                  <a:srgbClr val="0F1214"/>
                 </a:solidFill>
                 <a:latin typeface="Calibri" pitchFamily="34" charset="0"/>
                 <a:ea typeface="Calibri" pitchFamily="34" charset="-122"/>
@@ -12313,7 +12313,7 @@
             </a:avLst>
           </a:prstGeom>
           <a:solidFill>
-            <a:srgbClr val="0F1419"/>
+            <a:srgbClr val="0F1214"/>
           </a:solidFill>
           <a:ln/>
         </p:spPr>
@@ -12335,7 +12335,7 @@
             </a:avLst>
           </a:prstGeom>
           <a:solidFill>
-            <a:srgbClr val="14B8A6"/>
+            <a:srgbClr val="3B968F"/>
           </a:solidFill>
           <a:ln/>
         </p:spPr>
@@ -12349,7 +12349,7 @@
             <a:r>
               <a:rPr lang="en-US" sz="1500" b="1" dirty="0">
                 <a:solidFill>
-                  <a:srgbClr val="0F1419"/>
+                  <a:srgbClr val="0F1214"/>
                 </a:solidFill>
                 <a:latin typeface="Calibri" pitchFamily="34" charset="0"/>
                 <a:ea typeface="Calibri" pitchFamily="34" charset="-122"/>
@@ -12414,7 +12414,7 @@
     <p:bg>
       <p:bgPr>
         <a:solidFill>
-          <a:srgbClr val="0F1419"/>
+          <a:srgbClr val="0F1214"/>
         </a:solidFill>
       </p:bgPr>
     </p:bg>
@@ -12449,7 +12449,7 @@
             </a:avLst>
           </a:prstGeom>
           <a:solidFill>
-            <a:srgbClr val="2D1B1B"/>
+            <a:srgbClr val="2A1414"/>
           </a:solidFill>
           <a:ln/>
         </p:spPr>
@@ -12469,7 +12469,7 @@
             <a:avLst/>
           </a:prstGeom>
           <a:solidFill>
-            <a:srgbClr val="EF4444"/>
+            <a:srgbClr val="DC2626"/>
           </a:solidFill>
           <a:ln/>
         </p:spPr>
@@ -12525,7 +12525,7 @@
             <a:r>
               <a:rPr lang="en-US" sz="1200" b="1" spc="300" kern="0" dirty="0">
                 <a:solidFill>
-                  <a:srgbClr val="EF4444"/>
+                  <a:srgbClr val="DC2626"/>
                 </a:solidFill>
                 <a:latin typeface="Calibri" pitchFamily="34" charset="0"/>
                 <a:ea typeface="Calibri" pitchFamily="34" charset="-122"/>
@@ -12636,7 +12636,7 @@
     <p:bg>
       <p:bgPr>
         <a:solidFill>
-          <a:srgbClr val="0F1419"/>
+          <a:srgbClr val="0F1214"/>
         </a:solidFill>
       </p:bgPr>
     </p:bg>
@@ -12669,7 +12669,7 @@
             <a:avLst/>
           </a:prstGeom>
           <a:solidFill>
-            <a:srgbClr val="14B8A6">
+            <a:srgbClr val="3B968F">
               <a:alpha val="6000"/>
             </a:srgbClr>
           </a:solidFill>
@@ -12766,7 +12766,7 @@
             <a:r>
               <a:rPr lang="en-US" sz="1300" dirty="0">
                 <a:solidFill>
-                  <a:srgbClr val="94A3B8"/>
+                  <a:srgbClr val="8994A0"/>
                 </a:solidFill>
                 <a:latin typeface="Calibri" pitchFamily="34" charset="0"/>
                 <a:ea typeface="Calibri" pitchFamily="34" charset="-122"/>
@@ -12793,7 +12793,7 @@
             <a:avLst/>
           </a:prstGeom>
           <a:solidFill>
-            <a:srgbClr val="14B8A6"/>
+            <a:srgbClr val="3B968F"/>
           </a:solidFill>
           <a:ln/>
         </p:spPr>
@@ -12825,7 +12825,7 @@
             <a:r>
               <a:rPr lang="en-US" sz="1100" spc="300" kern="0" dirty="0">
                 <a:solidFill>
-                  <a:srgbClr val="64748B"/>
+                  <a:srgbClr val="5B6672"/>
                 </a:solidFill>
                 <a:latin typeface="Calibri" pitchFamily="34" charset="0"/>
                 <a:ea typeface="Calibri" pitchFamily="34" charset="-122"/>
@@ -12864,7 +12864,7 @@
             <a:r>
               <a:rPr lang="en-US" sz="1100" dirty="0">
                 <a:solidFill>
-                  <a:srgbClr val="009E8B"/>
+                  <a:srgbClr val="000000"/>
                 </a:solidFill>
                 <a:latin typeface="Calibri" pitchFamily="34" charset="0"/>
                 <a:ea typeface="Calibri" pitchFamily="34" charset="-122"/>
@@ -12890,7 +12890,7 @@
     <p:bg>
       <p:bgPr>
         <a:solidFill>
-          <a:srgbClr val="0F1419"/>
+          <a:srgbClr val="0F1214"/>
         </a:solidFill>
       </p:bgPr>
     </p:bg>
@@ -12923,7 +12923,7 @@
             <a:avLst/>
           </a:prstGeom>
           <a:solidFill>
-            <a:srgbClr val="14B8A6">
+            <a:srgbClr val="3B968F">
               <a:alpha val="12000"/>
             </a:srgbClr>
           </a:solidFill>
@@ -13087,7 +13087,7 @@
             <a:r>
               <a:rPr lang="en-US" sz="900" dirty="0">
                 <a:solidFill>
-                  <a:srgbClr val="64748B"/>
+                  <a:srgbClr val="5B6672"/>
                 </a:solidFill>
                 <a:latin typeface="Calibri" pitchFamily="34" charset="0"/>
                 <a:ea typeface="Calibri" pitchFamily="34" charset="-122"/>
@@ -13113,7 +13113,7 @@
     <p:bg>
       <p:bgPr>
         <a:solidFill>
-          <a:srgbClr val="0F1419"/>
+          <a:srgbClr val="0F1214"/>
         </a:solidFill>
       </p:bgPr>
     </p:bg>
@@ -13158,7 +13158,7 @@
             <a:r>
               <a:rPr lang="en-US" sz="2000" b="1" dirty="0">
                 <a:solidFill>
-                  <a:srgbClr val="14B8A6"/>
+                  <a:srgbClr val="3B968F"/>
                 </a:solidFill>
                 <a:latin typeface="Calibri" pitchFamily="34" charset="0"/>
                 <a:ea typeface="Calibri" pitchFamily="34" charset="-122"/>
@@ -13251,7 +13251,7 @@
             </a:avLst>
           </a:prstGeom>
           <a:solidFill>
-            <a:srgbClr val="1A2332"/>
+            <a:srgbClr val="1A2026"/>
           </a:solidFill>
           <a:ln/>
         </p:spPr>
@@ -13336,7 +13336,7 @@
             </a:avLst>
           </a:prstGeom>
           <a:solidFill>
-            <a:srgbClr val="1A2332"/>
+            <a:srgbClr val="1A2026"/>
           </a:solidFill>
           <a:ln/>
         </p:spPr>
@@ -13418,7 +13418,7 @@
     <p:bg>
       <p:bgPr>
         <a:solidFill>
-          <a:srgbClr val="0F1419"/>
+          <a:srgbClr val="0F1214"/>
         </a:solidFill>
       </p:bgPr>
     </p:bg>
@@ -13463,7 +13463,7 @@
             <a:r>
               <a:rPr lang="en-US" sz="2000" b="1" dirty="0">
                 <a:solidFill>
-                  <a:srgbClr val="14B8A6"/>
+                  <a:srgbClr val="3B968F"/>
                 </a:solidFill>
                 <a:latin typeface="Calibri" pitchFamily="34" charset="0"/>
                 <a:ea typeface="Calibri" pitchFamily="34" charset="-122"/>
@@ -13492,7 +13492,7 @@
             </a:avLst>
           </a:prstGeom>
           <a:solidFill>
-            <a:srgbClr val="1A2332"/>
+            <a:srgbClr val="1A2026"/>
           </a:solidFill>
           <a:ln/>
         </p:spPr>
@@ -13577,7 +13577,7 @@
             </a:avLst>
           </a:prstGeom>
           <a:solidFill>
-            <a:srgbClr val="1A2332"/>
+            <a:srgbClr val="1A2026"/>
           </a:solidFill>
           <a:ln/>
         </p:spPr>
@@ -13662,7 +13662,7 @@
             </a:avLst>
           </a:prstGeom>
           <a:solidFill>
-            <a:srgbClr val="1A2332"/>
+            <a:srgbClr val="1A2026"/>
           </a:solidFill>
           <a:ln/>
         </p:spPr>
@@ -13747,7 +13747,7 @@
             </a:avLst>
           </a:prstGeom>
           <a:solidFill>
-            <a:srgbClr val="1A2332"/>
+            <a:srgbClr val="1A2026"/>
           </a:solidFill>
           <a:ln/>
         </p:spPr>
@@ -13829,7 +13829,7 @@
     <p:bg>
       <p:bgPr>
         <a:solidFill>
-          <a:srgbClr val="0F1419"/>
+          <a:srgbClr val="0F1214"/>
         </a:solidFill>
       </p:bgPr>
     </p:bg>
@@ -13862,7 +13862,7 @@
             <a:avLst/>
           </a:prstGeom>
           <a:solidFill>
-            <a:srgbClr val="14B8A6">
+            <a:srgbClr val="3B968F">
               <a:alpha val="12000"/>
             </a:srgbClr>
           </a:solidFill>
@@ -13920,7 +13920,7 @@
             <a:r>
               <a:rPr lang="en-US" sz="2000" b="1" dirty="0">
                 <a:solidFill>
-                  <a:srgbClr val="14B8A6"/>
+                  <a:srgbClr val="3B968F"/>
                 </a:solidFill>
                 <a:latin typeface="Calibri" pitchFamily="34" charset="0"/>
                 <a:ea typeface="Calibri" pitchFamily="34" charset="-122"/>
@@ -14044,7 +14044,7 @@
             <a:r>
               <a:rPr lang="en-US" sz="900" dirty="0">
                 <a:solidFill>
-                  <a:srgbClr val="64748B"/>
+                  <a:srgbClr val="5B6672"/>
                 </a:solidFill>
                 <a:latin typeface="Calibri" pitchFamily="34" charset="0"/>
                 <a:ea typeface="Calibri" pitchFamily="34" charset="-122"/>
@@ -14070,7 +14070,7 @@
     <p:bg>
       <p:bgPr>
         <a:solidFill>
-          <a:srgbClr val="0F1419"/>
+          <a:srgbClr val="0F1214"/>
         </a:solidFill>
       </p:bgPr>
     </p:bg>
@@ -14103,7 +14103,7 @@
             <a:avLst/>
           </a:prstGeom>
           <a:solidFill>
-            <a:srgbClr val="14B8A6">
+            <a:srgbClr val="3B968F">
               <a:alpha val="12000"/>
             </a:srgbClr>
           </a:solidFill>
@@ -14161,7 +14161,7 @@
             <a:r>
               <a:rPr lang="en-US" sz="2000" b="1" dirty="0">
                 <a:solidFill>
-                  <a:srgbClr val="14B8A6"/>
+                  <a:srgbClr val="3B968F"/>
                 </a:solidFill>
                 <a:latin typeface="Calibri" pitchFamily="34" charset="0"/>
                 <a:ea typeface="Calibri" pitchFamily="34" charset="-122"/>
@@ -14264,7 +14264,7 @@
             <a:r>
               <a:rPr lang="en-US" sz="900" dirty="0">
                 <a:solidFill>
-                  <a:srgbClr val="64748B"/>
+                  <a:srgbClr val="5B6672"/>
                 </a:solidFill>
                 <a:latin typeface="Calibri" pitchFamily="34" charset="0"/>
                 <a:ea typeface="Calibri" pitchFamily="34" charset="-122"/>
@@ -14290,7 +14290,7 @@
     <p:bg>
       <p:bgPr>
         <a:solidFill>
-          <a:srgbClr val="0F1419"/>
+          <a:srgbClr val="0F1214"/>
         </a:solidFill>
       </p:bgPr>
     </p:bg>
@@ -14335,7 +14335,7 @@
             <a:r>
               <a:rPr lang="en-US" sz="2000" b="1" dirty="0">
                 <a:solidFill>
-                  <a:srgbClr val="14B8A6"/>
+                  <a:srgbClr val="3B968F"/>
                 </a:solidFill>
                 <a:latin typeface="Calibri" pitchFamily="34" charset="0"/>
                 <a:ea typeface="Calibri" pitchFamily="34" charset="-122"/>
@@ -14364,7 +14364,7 @@
             </a:avLst>
           </a:prstGeom>
           <a:solidFill>
-            <a:srgbClr val="1A2332"/>
+            <a:srgbClr val="1A2026"/>
           </a:solidFill>
           <a:ln/>
         </p:spPr>
@@ -14459,7 +14459,7 @@
             <a:r>
               <a:rPr lang="en-US" sz="900" dirty="0">
                 <a:solidFill>
-                  <a:srgbClr val="94A3B8"/>
+                  <a:srgbClr val="8994A0"/>
                 </a:solidFill>
                 <a:latin typeface="Calibri" pitchFamily="34" charset="0"/>
                 <a:ea typeface="Calibri" pitchFamily="34" charset="-122"/>
@@ -14488,7 +14488,7 @@
             </a:avLst>
           </a:prstGeom>
           <a:solidFill>
-            <a:srgbClr val="1A2332"/>
+            <a:srgbClr val="1A2026"/>
           </a:solidFill>
           <a:ln/>
         </p:spPr>
@@ -14573,7 +14573,7 @@
             </a:avLst>
           </a:prstGeom>
           <a:solidFill>
-            <a:srgbClr val="1A2332"/>
+            <a:srgbClr val="1A2026"/>
           </a:solidFill>
           <a:ln/>
         </p:spPr>
